--- a/docs/presentation/ReviewPulse_AIA1.pptx
+++ b/docs/presentation/ReviewPulse_AIA1.pptx
@@ -8419,7 +8419,7 @@
                   <a:srgbClr val="FFFFFF"/>
                 </a:highlight>
               </a:rPr>
-              <a:t>Aucune mesure d'accessibilité</a:t>
+              <a:t>Aucune mesure d'accessibilité — ADR 0004, 0005, 0020 pour ce qui est tenu</a:t>
             </a:r>
             <a:endParaRPr sz="1200">
               <a:solidFill>
@@ -10150,7 +10150,7 @@
                   <a:srgbClr val="FFFFFF"/>
                 </a:highlight>
               </a:rPr>
-              <a:t>Base légale écrite : intérêt légitime, RGPD 6.1.f. AI Act : risque minimal</a:t>
+              <a:t>Base légale écrite : intérêt légitime, RGPD 6.1.f. AI Act : risque minimal. ADR 0004.</a:t>
             </a:r>
             <a:endParaRPr sz="1300">
               <a:solidFill>

--- a/docs/presentation/ReviewPulse_AIA1.pptx
+++ b/docs/presentation/ReviewPulse_AIA1.pptx
@@ -8174,7 +8174,7 @@
                   <a:srgbClr val="FFFFFF"/>
                 </a:highlight>
               </a:rPr>
-              <a:t>Qualité : contrôles bloquants, Great Expectations, 43 tests dbt</a:t>
+              <a:t>Qualité : contrôles bloquants, Great Expectations, 30 tests dbt déclarés</a:t>
             </a:r>
             <a:endParaRPr sz="1200">
               <a:solidFill>

--- a/docs/presentation/ReviewPulse_AIA1.pptx
+++ b/docs/presentation/ReviewPulse_AIA1.pptx
@@ -11698,8 +11698,997 @@
 </p:sld>
 </file>
 
-<file path=ppt/slides/slide6.xml><?xml version="1.0" encoding="UTF-8" standalone="yes"?>-<p:sld xmlns:a="http://schemas.openxmlformats.org/drawingml/2006/main" xmlns:r="http://schemas.openxmlformats.org/officeDocument/2006/relationships" xmlns:mc="http://schemas.openxmlformats.org/markup-compatibility/2006" xmlns:mv="urn:schemas-microsoft-com:mac:vml" xmlns:p="http://schemas.openxmlformats.org/presentationml/2006/main" xmlns:c="http://schemas.openxmlformats.org/drawingml/2006/chart" xmlns:dgm="http://schemas.openxmlformats.org/drawingml/2006/diagram" xmlns:o="urn:schemas-microsoft-com:office:office" xmlns:v="urn:schemas-microsoft-com:vml" xmlns:pvml="urn:schemas-microsoft-com:office:powerpoint" xmlns:com="http://schemas.openxmlformats.org/drawingml/2006/compatibility" xmlns:p14="http://schemas.microsoft.com/office/powerpoint/2010/main" xmlns:p15="http://schemas.microsoft.com/office/powerpoint/2012/main" xmlns:ahyp="http://schemas.microsoft.com/office/drawing/2018/hyperlinkcolor"><p:cSld><p:spTree><p:nvGrpSpPr><p:cNvPr id="101" name="Shape 101"/><p:cNvGrpSpPr/><p:nvPr/></p:nvGrpSpPr><p:grpSpPr><a:xfrm><a:off x="0" y="0"/><a:ext cx="0" cy="0"/><a:chOff x="0" y="0"/><a:chExt cx="0" cy="0"/></a:xfrm></p:grpSpPr><p:sp><p:nvSpPr><p:cNvPr id="102" name="Google Shape;102;p18"/><p:cNvSpPr txBox="1"/><p:nvPr><p:ph idx="4294967295" type="ctrTitle"/></p:nvPr></p:nvSpPr><p:spPr><a:xfrm><a:off x="1073814" y="409334"/><a:ext cx="5315100" cy="533100"/></a:xfrm><a:prstGeom prst="rect"><a:avLst/></a:prstGeom><a:noFill/><a:ln><a:noFill/></a:ln></p:spPr><p:txBody><a:bodyPr anchorCtr="0" anchor="t" bIns="91425" lIns="91425" spcFirstLastPara="1" rIns="91425" wrap="square" tIns="91425"><a:noAutofit/></a:bodyPr><a:lstStyle/><a:p><a:pPr indent="0" lvl="0" marL="0" marR="0" rtl="0" algn="l"><a:lnSpc><a:spcPct val="100000"/></a:lnSpc><a:spcBef><a:spcPts val="0"/></a:spcBef><a:spcAft><a:spcPts val="0"/></a:spcAft><a:buNone/></a:pPr><a:r><a:rPr lang="fr" sz="2500"><a:solidFill><a:srgbClr val="0E3449"/></a:solidFill><a:latin typeface="Inter SemiBold"/><a:ea typeface="Inter SemiBold"/><a:cs typeface="Inter SemiBold"/><a:sym typeface="Inter SemiBold"/></a:rPr><a:t>Le pilote : ReviewPulse</a:t></a:r><a:endParaRPr i="0" sz="2500" u="none" cap="none" strike="noStrike"><a:solidFill><a:srgbClr val="0E3449"/></a:solidFill><a:latin typeface="Inter SemiBold"/><a:ea typeface="Inter SemiBold"/><a:cs typeface="Inter SemiBold"/><a:sym typeface="Inter SemiBold"/></a:endParaRPr></a:p></p:txBody></p:sp><p:sp><p:nvSpPr><p:cNvPr id="103" name="Google Shape;103;p18"/><p:cNvSpPr/><p:nvPr/></p:nvSpPr><p:spPr><a:xfrm><a:off x="43775" y="4892100"/><a:ext cx="9144000" cy="251400"/></a:xfrm><a:prstGeom prst="rect"><a:avLst/></a:prstGeom><a:solidFill><a:srgbClr val="C3FFFC"/></a:solidFill><a:ln><a:noFill/></a:ln></p:spPr><p:txBody><a:bodyPr anchorCtr="0" anchor="ctr" bIns="91425" lIns="91425" spcFirstLastPara="1" rIns="91425" wrap="square" tIns="91425"><a:noAutofit/></a:bodyPr><a:lstStyle/><a:p><a:pPr indent="0" lvl="0" marL="0" marR="0" rtl="0" algn="l"><a:lnSpc><a:spcPct val="100000"/></a:lnSpc><a:spcBef><a:spcPts val="0"/></a:spcBef><a:spcAft><a:spcPts val="0"/></a:spcAft><a:buClr><a:srgbClr val="000000"/></a:buClr><a:buSzPts val="1400"/><a:buFont typeface="Arial"/><a:buNone/></a:pPr><a:r><a:t></a:t></a:r><a:endParaRPr b="0" i="0" sz="1400" u="none" cap="none" strike="noStrike"><a:solidFill><a:srgbClr val="000000"/></a:solidFill><a:latin typeface="Arial"/><a:ea typeface="Arial"/><a:cs typeface="Arial"/><a:sym typeface="Arial"/></a:endParaRPr></a:p></p:txBody></p:sp><p:pic><p:nvPicPr><p:cNvPr id="104" name="Google Shape;104;p18"/><p:cNvPicPr preferRelativeResize="0"/><p:nvPr/></p:nvPicPr><p:blipFill rotWithShape="1"><a:blip r:embed="rId3"><a:alphaModFix/></a:blip><a:srcRect b="0" l="0" r="0" t="0"/><a:stretch/></p:blipFill><p:spPr><a:xfrm><a:off x="496925" y="482927"/><a:ext cx="576900" cy="385904"/></a:xfrm><a:prstGeom prst="rect"><a:avLst/></a:prstGeom><a:noFill/><a:ln><a:noFill/></a:ln></p:spPr></p:pic><p:sp><p:nvSpPr><p:cNvPr id="105" name="Google Shape;105;p18"/><p:cNvSpPr txBox="1"/><p:nvPr/></p:nvSpPr><p:spPr><a:xfrm><a:off x="3518399" y="329500"/><a:ext cx="5163600" cy="738900"/></a:xfrm><a:prstGeom prst="rect"><a:avLst/></a:prstGeom><a:noFill/><a:ln><a:noFill/></a:ln></p:spPr><p:txBody><a:bodyPr anchorCtr="0" anchor="t" bIns="91425" lIns="91425" spcFirstLastPara="1" rIns="91425" wrap="square" tIns="91425"><a:spAutoFit/></a:bodyPr><a:lstStyle/><a:p><a:pPr indent="0" lvl="0" marL="0" rtl="0" algn="l"><a:spcBef><a:spcPts val="0"/></a:spcBef><a:spcAft><a:spcPts val="0"/></a:spcAft><a:buNone/></a:pPr><a:r><a:rPr lang="fr" sz="1800"><a:solidFill><a:schemeClr val="dk2"/></a:solidFill></a:rPr><a:t>Un périmètre restreint, mais réel</a:t></a:r><a:br><a:rPr lang="fr" sz="1800"><a:solidFill><a:schemeClr val="dk2"/></a:solidFill></a:rPr></a:br><a:r><a:rPr lang="fr" sz="1800"><a:solidFill><a:schemeClr val="dk2"/></a:solidFill></a:rPr><a:t>Analyse de sentiment d'avis Steam — 9 271 lignes brutes, 3 jeux, 2 langues</a:t></a:r><a:endParaRPr sz="1800"><a:solidFill><a:schemeClr val="dk2"/></a:solidFill></a:endParaRPr></a:p></p:txBody></p:sp><p:sp><p:nvSpPr><p:cNvPr id="106" name="Google Shape;106;p18"/><p:cNvSpPr/><p:nvPr/></p:nvSpPr><p:spPr><a:xfrm><a:off x="402939" y="1156461"/><a:ext cx="3615000" cy="193800"/></a:xfrm><a:prstGeom prst="rect"><a:avLst/></a:prstGeom><a:noFill/><a:ln><a:noFill/></a:ln></p:spPr><p:txBody><a:bodyPr anchorCtr="0" anchor="t" bIns="0" lIns="0" spcFirstLastPara="1" rIns="0" wrap="square" tIns="0"><a:noAutofit/></a:bodyPr><a:lstStyle/><a:p><a:pPr indent="0" lvl="0" marL="0" marR="0" rtl="0" algn="l"><a:lnSpc><a:spcPct val="125000"/></a:lnSpc><a:spcBef><a:spcPts val="0"/></a:spcBef><a:spcAft><a:spcPts val="0"/></a:spcAft><a:buClr><a:srgbClr val="0C0D0F"/></a:buClr><a:buSzPts val="1217"/><a:buFont typeface="Inter"/><a:buNone/></a:pPr><a:r><a:rPr lang="fr" sz="1217"><a:solidFill><a:srgbClr val="0C0D0F"/></a:solidFill><a:latin typeface="Inter"/><a:ea typeface="Inter"/><a:cs typeface="Inter"/><a:sym typeface="Inter"/></a:rPr><a:t>Cinq propriétés que la gouvernance exige, et qui sont ici mesurables</a:t></a:r><a:endParaRPr b="0" i="0" sz="1217" u="none" cap="none" strike="noStrike"/></a:p></p:txBody></p:sp><p:sp><p:nvSpPr><p:cNvPr id="107" name="Google Shape;107;p18"/><p:cNvSpPr/><p:nvPr/></p:nvSpPr><p:spPr><a:xfrm><a:off x="402961" y="1448759"/><a:ext cx="1498200" cy="711900"/></a:xfrm><a:prstGeom prst="roundRect"><a:avLst><a:gd fmla="val 11687" name="adj"/></a:avLst></a:prstGeom><a:solidFill><a:srgbClr val="FFFFFF"/></a:solidFill><a:ln cap="flat" cmpd="sng" w="8125"><a:solidFill><a:srgbClr val="FF7047"/></a:solidFill><a:prstDash val="solid"/><a:round/><a:headEnd len="sm" w="sm" type="none"/><a:tailEnd len="sm" w="sm" type="none"/ xml:space="preserve"> 1. </a:t></a:r><a:r><a:rPr b="1" lang="fr" sz="1054"><a:solidFill><a:srgbClr val="55575A"/></a:solidFill><a:latin typeface="Manrope"/><a:ea typeface="Manrope"/><a:cs typeface="Manrope"/><a:sym typeface="Manrope"/></a:rPr><a:t>Zone brute immuable</a:t></a:r><a:endParaRPr b="1" sz="1054"><a:solidFill><a:srgbClr val="55575A"/></a:solidFill><a:latin typeface="Manrope"/><a:ea typeface="Manrope"/><a:cs typeface="Manrope"/><a:sym typeface="Manrope"/></a:endParaRPr></a:p></p:txBody></p:sp><p:sp><p:nvSpPr><p:cNvPr id="108" name="Google Shape;108;p18"/><p:cNvSpPr/><p:nvPr/></p:nvSpPr><p:spPr><a:xfrm><a:off x="2194798" y="1438311"/><a:ext cx="1498200" cy="711900"/></a:xfrm><a:prstGeom prst="roundRect"><a:avLst><a:gd fmla="val 11687" name="adj"/></a:avLst></a:prstGeom><a:solidFill><a:srgbClr val="FFFFFF"/></a:solidFill><a:ln cap="flat" cmpd="sng" w="8125"><a:solidFill><a:srgbClr val="FF7047"/></a:solidFill><a:prstDash val="solid"/><a:round/><a:headEnd len="sm" w="sm" type="none"/><a:tailEnd len="sm" w="sm" type="none"/ xml:space="preserve">2. Ingestion idempotente </a:t></a:r><a:br><a:rPr b="1" lang="fr" sz="1000"><a:solidFill><a:srgbClr val="55575A"/></a:solidFill><a:latin typeface="Manrope"/><a:ea typeface="Manrope"/><a:cs typeface="Manrope"/><a:sym typeface="Manrope"/></a:rPr></a:br><a:r><a:rPr b="1" lang="fr" sz="1000"><a:solidFill><a:srgbClr val="55575A"/></a:solidFill><a:latin typeface="Manrope"/><a:ea typeface="Manrope"/><a:cs typeface="Manrope"/><a:sym typeface="Manrope"/></a:rPr><a:t>par manifeste d'identifiants</a:t></a:r><a:endParaRPr b="1" sz="1000"><a:solidFill><a:srgbClr val="55575A"/></a:solidFill><a:latin typeface="Manrope"/><a:ea typeface="Manrope"/><a:cs typeface="Manrope"/><a:sym typeface="Manrope"/></a:endParaRPr></a:p></p:txBody></p:sp><p:sp><p:nvSpPr><p:cNvPr id="109" name="Google Shape;109;p18"/><p:cNvSpPr/><p:nvPr/></p:nvSpPr><p:spPr><a:xfrm><a:off x="3764412" y="1449638"/><a:ext cx="1498200" cy="711900"/></a:xfrm><a:prstGeom prst="roundRect"><a:avLst><a:gd fmla="val 11687" name="adj"/></a:avLst></a:prstGeom><a:solidFill><a:srgbClr val="FFFFFF"/></a:solidFill><a:ln cap="flat" cmpd="sng" w="8125"><a:solidFill><a:srgbClr val="FF7047"/></a:solidFill><a:prstDash val="solid"/><a:round/><a:headEnd len="sm" w="sm" type="none"/><a:tailEnd len="sm" w="sm" type="none"/>3. Pseudonymisation HMAC salée</a:t></a:r><a:endParaRPr b="1" sz="1200"><a:solidFill><a:srgbClr val="55575A"/></a:solidFill><a:latin typeface="Manrope"/><a:ea typeface="Manrope"/><a:cs typeface="Manrope"/><a:sym typeface="Manrope"/></a:endParaRPr></a:p></p:txBody></p:sp><p:sp><p:nvSpPr><p:cNvPr id="110" name="Google Shape;110;p18"/><p:cNvSpPr/><p:nvPr/></p:nvSpPr><p:spPr><a:xfrm><a:off x="5351099" y="1449650"/><a:ext cx="1498200" cy="711900"/></a:xfrm><a:prstGeom prst="roundRect"><a:avLst><a:gd fmla="val 11687" name="adj"/></a:avLst></a:prstGeom><a:solidFill><a:srgbClr val="FFFFFF"/></a:solidFill><a:ln cap="flat" cmpd="sng" w="8125"><a:solidFill><a:srgbClr val="FF7047"/></a:solidFill><a:prstDash val="solid"/><a:round/><a:headEnd len="sm" w="sm" type="none"/><a:tailEnd len="sm" w="sm" type="none"/>4. Contrôles bloquants</a:t></a:r><a:endParaRPr b="1" sz="1200"><a:solidFill><a:srgbClr val="55575A"/></a:solidFill><a:latin typeface="Manrope"/><a:ea typeface="Manrope"/><a:cs typeface="Manrope"/><a:sym typeface="Manrope"/></a:endParaRPr></a:p></p:txBody></p:sp><p:sp><p:nvSpPr><p:cNvPr id="111" name="Google Shape;111;p18"/><p:cNvSpPr/><p:nvPr/></p:nvSpPr><p:spPr><a:xfrm><a:off x="6937799" y="1460100"/><a:ext cx="1498200" cy="711900"/></a:xfrm><a:prstGeom prst="roundRect"><a:avLst><a:gd fmla="val 11687" name="adj"/></a:avLst></a:prstGeom><a:solidFill><a:srgbClr val="FFFFFF"/></a:solidFill><a:ln cap="flat" cmpd="sng" w="8125"><a:solidFill><a:srgbClr val="FF7047"/></a:solidFill><a:prstDash val="solid"/><a:round/><a:headEnd len="sm" w="sm" type="none"/><a:tailEnd len="sm" w="sm" type="none"/>5. Traçabilité du commit au modèle</a:t></a:r><a:endParaRPr b="1" sz="1200"><a:solidFill><a:srgbClr val="55575A"/></a:solidFill><a:latin typeface="Manrope"/><a:ea typeface="Manrope"/><a:cs typeface="Manrope"/><a:sym typeface="Manrope"/></a:endParaRPr></a:p></p:txBody></p:sp><p:sp><p:nvSpPr><p:cNvPr id="112" name="Google Shape;112;p18"/><p:cNvSpPr txBox="1"/><p:nvPr/></p:nvSpPr><p:spPr><a:xfrm><a:off x="402950" y="2701550"/><a:ext cx="8033100" cy="1639200"/></a:xfrm><a:prstGeom prst="rect"><a:avLst/></a:prstGeom><a:noFill/><a:ln><a:noFill/></a:ln></p:spPr><p:txBody><a:bodyPr anchorCtr="0" anchor="t" bIns="91425" lIns="91425" spcFirstLastPara="1" rIns="91425" wrap="square" tIns="91425"><a:spAutoFit/></a:bodyPr><a:lstStyle/><a:p><a:pPr indent="0" lvl="0" marL="0" rtl="0" algn="l"><a:lnSpc><a:spcPct val="115000"/></a:lnSpc><a:spcBef><a:spcPts val="0"/></a:spcBef><a:spcAft><a:spcPts val="0"/></a:spcAft><a:buNone/></a:pPr><a:r><a:rPr b="1" lang="fr"><a:solidFill><a:srgbClr val="015955"/></a:solidFill><a:highlight><a:schemeClr val="lt1"/></a:highlight></a:rPr><a:t>Pourquoi un pilote :</a:t></a:r><a:r><a:rPr lang="fr"><a:solidFill><a:srgbClr val="27251E"/></a:solidFill><a:highlight><a:schemeClr val="lt1"/></a:highlight></a:rPr><a:t> </a:t></a:r><a:endParaRPr><a:solidFill><a:srgbClr val="27251E"/></a:solidFill><a:highlight><a:schemeClr val="lt1"/></a:highlight></a:endParaRPr></a:p><a:p><a:pPr indent="-317500" lvl="0" marL="457200" rtl="0" algn="l"><a:lnSpc><a:spcPct val="115000"/></a:lnSpc><a:spcBef><a:spcPts val="0"/></a:spcBef><a:spcAft><a:spcPts val="0"/></a:spcAft><a:buClr><a:schemeClr val="dk2"/></a:buClr><a:buSzPts val="1400"/><a:buChar char="●"/></a:pPr><a:r><a:rPr lang="fr"><a:solidFill><a:schemeClr val="dk2"/></a:solidFill><a:highlight><a:schemeClr val="lt1"/></a:highlight></a:rPr><a:t>le cas</a:t></a:r><a:r><a:rPr lang="fr"><a:solidFill><a:schemeClr val="dk2"/></a:solidFill></a:rPr><a:t xml:space="preserve"> </a:t></a:r><a:r><a:rPr b="1" lang="fr"><a:solidFill><a:schemeClr val="dk2"/></a:solidFill></a:rPr><a:t>l'exige avant la généralisation</a:t></a:r><a:endParaRPr b="1"><a:solidFill><a:schemeClr val="dk2"/></a:solidFill></a:endParaRPr></a:p><a:p><a:pPr indent="-317500" lvl="0" marL="457200" rtl="0" algn="l"><a:lnSpc><a:spcPct val="115000"/></a:lnSpc><a:spcBef><a:spcPts val="0"/></a:spcBef><a:spcAft><a:spcPts val="0"/></a:spcAft><a:buClr><a:schemeClr val="dk2"/></a:buClr><a:buSzPts val="1400"/><a:buChar char="●"/></a:pPr><a:r><a:rPr lang="fr"><a:solidFill><a:schemeClr val="dk2"/></a:solidFill><a:highlight><a:schemeClr val="lt1"/></a:highlight></a:rPr><a:t>Un cadre qui n'a jamais tourné n'est pas un cadre</a:t></a:r><a:r><a:rPr lang="fr"><a:solidFill><a:schemeClr val="dk2"/></a:solidFill></a:rPr><a:t xml:space="preserve"> — </a:t></a:r><a:r><a:rPr b="1" lang="fr"><a:solidFill><a:schemeClr val="dk2"/></a:solidFill></a:rPr><a:t xml:space="preserve">il se démontre au lieu de se décrire </a:t></a:r><a:endParaRPr b="1"><a:solidFill><a:schemeClr val="dk2"/></a:solidFill></a:endParaRPr></a:p><a:p><a:pPr indent="-317500" lvl="0" marL="457200" rtl="0" algn="l"><a:lnSpc><a:spcPct val="115000"/></a:lnSpc><a:spcBef><a:spcPts val="0"/></a:spcBef><a:spcAft><a:spcPts val="0"/></a:spcAft><a:buClr><a:schemeClr val="dk2"/></a:buClr><a:buSzPts val="1400"/><a:buChar char="●"/></a:pPr><a:r><a:rPr lang="fr"><a:solidFill><a:schemeClr val="dk2"/></a:solidFill><a:highlight><a:schemeClr val="lt1"/></a:highlight></a:rPr><a:t>Ce qui manque</a:t></a:r><a:r><a:rPr lang="fr"><a:solidFill><a:schemeClr val="dk2"/></a:solidFill></a:rPr><a:t xml:space="preserve"> y est nommé </a:t></a:r><a:r><a:rPr b="1" lang="fr"><a:solidFill><a:schemeClr val="dk2"/></a:solidFill></a:rPr><a:t>comme manquant</a:t></a:r><a:endParaRPr b="1"><a:solidFill><a:schemeClr val="dk2"/></a:solidFill></a:endParaRPr></a:p><a:p><a:pPr indent="-317500" lvl="0" marL="457200" rtl="0" algn="l"><a:lnSpc><a:spcPct val="115000"/></a:lnSpc><a:spcBef><a:spcPts val="0"/></a:spcBef><a:spcAft><a:spcPts val="0"/></a:spcAft><a:buClr><a:schemeClr val="dk2"/></a:buClr><a:buSzPts val="1400"/><a:buChar char="●"/></a:pPr><a:r><a:rPr lang="fr"><a:solidFill><a:schemeClr val="dk2"/></a:solidFill></a:rPr><a:t xml:space="preserve">Dossier complet : docs/17_gouvernance.md </a:t></a:r><a:r><a:rPr b="1" lang="fr"><a:solidFill><a:schemeClr val="dk2"/></a:solidFill></a:rPr><a:t></a:t></a:r><a:endParaRPr><a:solidFill><a:schemeClr val="dk2"/></a:solidFill></a:endParaRPr></a:p><a:p><a:pPr indent="-317500" lvl="0" marL="457200" rtl="0" algn="l"><a:lnSpc><a:spcPct val="115000"/></a:lnSpc><a:spcBef><a:spcPts val="0"/></a:spcBef><a:spcAft><a:spcPts val="0"/></a:spcAft><a:buClr><a:schemeClr val="dk2"/></a:buClr><a:buSzPts val="1400"/><a:buChar char="●"/></a:pPr><a:r><a:rPr lang="fr"><a:solidFill><a:schemeClr val="dk2"/></a:solidFill></a:rPr><a:t xml:space="preserve">Exigences relevées : docs/00_sources/ </a:t></a:r><a:r><a:rPr b="1" lang="fr"><a:solidFill><a:schemeClr val="dk2"/></a:solidFill></a:rPr><a:t></a:t></a:r><a:r><a:rPr lang="fr"><a:solidFill><a:schemeClr val="dk2"/></a:solidFill></a:rPr><a:t></a:t></a:r><a:endParaRPr sz="1800"><a:solidFill><a:schemeClr val="dk2"/></a:solidFill></a:endParaRPr></a:p></p:txBody></p:sp></p:spTree></p:cSld><p:clrMapOvr><a:masterClrMapping/></p:clrMapOvr></p:sld>
+<file path=ppt/slides/slide6.xml><?xml version="1.0" encoding="utf-8"?>
+<p:sld xmlns:a="http://schemas.openxmlformats.org/drawingml/2006/main" xmlns:r="http://schemas.openxmlformats.org/officeDocument/2006/relationships" xmlns:mc="http://schemas.openxmlformats.org/markup-compatibility/2006" xmlns:mv="urn:schemas-microsoft-com:mac:vml" xmlns:p="http://schemas.openxmlformats.org/presentationml/2006/main" xmlns:c="http://schemas.openxmlformats.org/drawingml/2006/chart" xmlns:dgm="http://schemas.openxmlformats.org/drawingml/2006/diagram" xmlns:o="urn:schemas-microsoft-com:office:office" xmlns:v="urn:schemas-microsoft-com:vml" xmlns:pvml="urn:schemas-microsoft-com:office:powerpoint" xmlns:com="http://schemas.openxmlformats.org/drawingml/2006/compatibility" xmlns:p14="http://schemas.microsoft.com/office/powerpoint/2010/main" xmlns:p15="http://schemas.microsoft.com/office/powerpoint/2012/main" xmlns:ahyp="http://schemas.microsoft.com/office/drawing/2018/hyperlinkcolor">
+  <p:cSld>
+    <p:spTree>
+      <p:nvGrpSpPr>
+        <p:cNvPr id="101" name="Shape 101"/>
+        <p:cNvGrpSpPr/>
+        <p:nvPr/>
+      </p:nvGrpSpPr>
+      <p:grpSpPr>
+        <a:xfrm>
+          <a:off x="0" y="0"/>
+          <a:ext cx="0" cy="0"/>
+          <a:chOff x="0" y="0"/>
+          <a:chExt cx="0" cy="0"/>
+        </a:xfrm>
+      </p:grpSpPr>
+      <p:sp>
+        <p:nvSpPr>
+          <p:cNvPr id="102" name="Google Shape;102;p18"/>
+          <p:cNvSpPr txBox="1"/>
+          <p:nvPr>
+            <p:ph idx="4294967295" type="ctrTitle"/>
+          </p:nvPr>
+        </p:nvSpPr>
+        <p:spPr>
+          <a:xfrm>
+            <a:off x="1073814" y="409334"/>
+            <a:ext cx="5315100" cy="533100"/>
+          </a:xfrm>
+          <a:prstGeom prst="rect">
+            <a:avLst/>
+          </a:prstGeom>
+          <a:noFill/>
+          <a:ln>
+            <a:noFill/>
+          </a:ln>
+        </p:spPr>
+        <p:txBody>
+          <a:bodyPr anchorCtr="0" anchor="t" bIns="91425" lIns="91425" spcFirstLastPara="1" rIns="91425" wrap="square" tIns="91425">
+            <a:noAutofit/>
+          </a:bodyPr>
+          <a:lstStyle/>
+          <a:p>
+            <a:pPr indent="0" lvl="0" marL="0" marR="0" rtl="0" algn="l">
+              <a:lnSpc>
+                <a:spcPct val="100000"/>
+              </a:lnSpc>
+              <a:spcBef>
+                <a:spcPts val="0"/>
+              </a:spcBef>
+              <a:spcAft>
+                <a:spcPts val="0"/>
+              </a:spcAft>
+              <a:buNone/>
+            </a:pPr>
+            <a:r>
+              <a:rPr lang="fr" sz="2500">
+                <a:solidFill>
+                  <a:srgbClr val="0E3449"/>
+                </a:solidFill>
+                <a:latin typeface="Inter SemiBold"/>
+                <a:ea typeface="Inter SemiBold"/>
+                <a:cs typeface="Inter SemiBold"/>
+                <a:sym typeface="Inter SemiBold"/>
+              </a:rPr>
+              <a:t>Le pilote : ReviewPulse</a:t>
+            </a:r>
+            <a:endParaRPr i="0" sz="2500" u="none" cap="none" strike="noStrike">
+              <a:solidFill>
+                <a:srgbClr val="0E3449"/>
+              </a:solidFill>
+              <a:latin typeface="Inter SemiBold"/>
+              <a:ea typeface="Inter SemiBold"/>
+              <a:cs typeface="Inter SemiBold"/>
+              <a:sym typeface="Inter SemiBold"/>
+            </a:endParaRPr>
+          </a:p>
+        </p:txBody>
+      </p:sp>
+      <p:sp>
+        <p:nvSpPr>
+          <p:cNvPr id="103" name="Google Shape;103;p18"/>
+          <p:cNvSpPr/>
+          <p:nvPr/>
+        </p:nvSpPr>
+        <p:spPr>
+          <a:xfrm>
+            <a:off x="43775" y="4892100"/>
+            <a:ext cx="9144000" cy="251400"/>
+          </a:xfrm>
+          <a:prstGeom prst="rect">
+            <a:avLst/>
+          </a:prstGeom>
+          <a:solidFill>
+            <a:srgbClr val="C3FFFC"/>
+          </a:solidFill>
+          <a:ln>
+            <a:noFill/>
+          </a:ln>
+        </p:spPr>
+        <p:txBody>
+          <a:bodyPr anchorCtr="0" anchor="ctr" bIns="91425" lIns="91425" spcFirstLastPara="1" rIns="91425" wrap="square" tIns="91425">
+            <a:noAutofit/>
+          </a:bodyPr>
+          <a:lstStyle/>
+          <a:p>
+            <a:pPr indent="0" lvl="0" marL="0" marR="0" rtl="0" algn="l">
+              <a:lnSpc>
+                <a:spcPct val="100000"/>
+              </a:lnSpc>
+              <a:spcBef>
+                <a:spcPts val="0"/>
+              </a:spcBef>
+              <a:spcAft>
+                <a:spcPts val="0"/>
+              </a:spcAft>
+              <a:buClr>
+                <a:srgbClr val="000000"/>
+              </a:buClr>
+              <a:buSzPts val="1400"/>
+              <a:buFont typeface="Arial"/>
+              <a:buNone/>
+            </a:pPr>
+            <a:r>
+              <a:t/>
+            </a:r>
+            <a:endParaRPr b="0" i="0" sz="1400" u="none" cap="none" strike="noStrike">
+              <a:solidFill>
+                <a:srgbClr val="000000"/>
+              </a:solidFill>
+              <a:latin typeface="Arial"/>
+              <a:ea typeface="Arial"/>
+              <a:cs typeface="Arial"/>
+              <a:sym typeface="Arial"/>
+            </a:endParaRPr>
+          </a:p>
+        </p:txBody>
+      </p:sp>
+      <p:pic>
+        <p:nvPicPr>
+          <p:cNvPr id="104" name="Google Shape;104;p18"/>
+          <p:cNvPicPr preferRelativeResize="0"/>
+          <p:nvPr/>
+        </p:nvPicPr>
+        <p:blipFill rotWithShape="1">
+          <a:blip r:embed="rId3">
+            <a:alphaModFix/>
+          </a:blip>
+          <a:srcRect b="0" l="0" r="0" t="0"/>
+          <a:stretch/>
+        </p:blipFill>
+        <p:spPr>
+          <a:xfrm>
+            <a:off x="496925" y="482927"/>
+            <a:ext cx="576900" cy="385904"/>
+          </a:xfrm>
+          <a:prstGeom prst="rect">
+            <a:avLst/>
+          </a:prstGeom>
+          <a:noFill/>
+          <a:ln>
+            <a:noFill/>
+          </a:ln>
+        </p:spPr>
+      </p:pic>
+      <p:sp>
+        <p:nvSpPr>
+          <p:cNvPr id="105" name="Google Shape;105;p18"/>
+          <p:cNvSpPr txBox="1"/>
+          <p:nvPr/>
+        </p:nvSpPr>
+        <p:spPr>
+          <a:xfrm>
+            <a:off x="3518399" y="329500"/>
+            <a:ext cx="5163600" cy="738900"/>
+          </a:xfrm>
+          <a:prstGeom prst="rect">
+            <a:avLst/>
+          </a:prstGeom>
+          <a:noFill/>
+          <a:ln>
+            <a:noFill/>
+          </a:ln>
+        </p:spPr>
+        <p:txBody>
+          <a:bodyPr anchorCtr="0" anchor="t" bIns="91425" lIns="91425" spcFirstLastPara="1" rIns="91425" wrap="square" tIns="91425">
+            <a:spAutoFit/>
+          </a:bodyPr>
+          <a:lstStyle/>
+          <a:p>
+            <a:pPr indent="0" lvl="0" marL="0" rtl="0" algn="l">
+              <a:spcBef>
+                <a:spcPts val="0"/>
+              </a:spcBef>
+              <a:spcAft>
+                <a:spcPts val="0"/>
+              </a:spcAft>
+              <a:buNone/>
+            </a:pPr>
+            <a:r>
+              <a:rPr lang="fr" sz="1800">
+                <a:solidFill>
+                  <a:schemeClr val="dk2"/>
+                </a:solidFill>
+              </a:rPr>
+              <a:t>Un périmètre restreint, mais réel</a:t>
+            </a:r>
+            <a:br>
+              <a:rPr lang="fr" sz="1800">
+                <a:solidFill>
+                  <a:schemeClr val="dk2"/>
+                </a:solidFill>
+              </a:rPr>
+            </a:br>
+            <a:r>
+              <a:rPr lang="fr" sz="1800">
+                <a:solidFill>
+                  <a:schemeClr val="dk2"/>
+                </a:solidFill>
+              </a:rPr>
+              <a:t>Analyse de sentiment d'avis Steam — 9 271 lignes brutes, 3 jeux, 2 langues</a:t>
+            </a:r>
+            <a:endParaRPr sz="1800">
+              <a:solidFill>
+                <a:schemeClr val="dk2"/>
+              </a:solidFill>
+            </a:endParaRPr>
+          </a:p>
+        </p:txBody>
+      </p:sp>
+      <p:sp>
+        <p:nvSpPr>
+          <p:cNvPr id="106" name="Google Shape;106;p18"/>
+          <p:cNvSpPr/>
+          <p:nvPr/>
+        </p:nvSpPr>
+        <p:spPr>
+          <a:xfrm>
+            <a:off x="402939" y="1156461"/>
+            <a:ext cx="3615000" cy="193800"/>
+          </a:xfrm>
+          <a:prstGeom prst="rect">
+            <a:avLst/>
+          </a:prstGeom>
+          <a:noFill/>
+          <a:ln>
+            <a:noFill/>
+          </a:ln>
+        </p:spPr>
+        <p:txBody>
+          <a:bodyPr anchorCtr="0" anchor="t" bIns="0" lIns="0" spcFirstLastPara="1" rIns="0" wrap="square" tIns="0">
+            <a:noAutofit/>
+          </a:bodyPr>
+          <a:lstStyle/>
+          <a:p>
+            <a:pPr indent="0" lvl="0" marL="0" marR="0" rtl="0" algn="l">
+              <a:lnSpc>
+                <a:spcPct val="125000"/>
+              </a:lnSpc>
+              <a:spcBef>
+                <a:spcPts val="0"/>
+              </a:spcBef>
+              <a:spcAft>
+                <a:spcPts val="0"/>
+              </a:spcAft>
+              <a:buClr>
+                <a:srgbClr val="0C0D0F"/>
+              </a:buClr>
+              <a:buSzPts val="1217"/>
+              <a:buFont typeface="Inter"/>
+              <a:buNone/>
+            </a:pPr>
+            <a:r>
+              <a:rPr lang="fr" sz="1217">
+                <a:solidFill>
+                  <a:srgbClr val="0C0D0F"/>
+                </a:solidFill>
+                <a:latin typeface="Inter"/>
+                <a:ea typeface="Inter"/>
+                <a:cs typeface="Inter"/>
+                <a:sym typeface="Inter"/>
+              </a:rPr>
+              <a:t>Cinq propriétés que la gouvernance exige, et qui sont ici mesurables</a:t>
+            </a:r>
+            <a:endParaRPr b="0" i="0" sz="1217" u="none" cap="none" strike="noStrike"/>
+          </a:p>
+        </p:txBody>
+      </p:sp>
+      <p:sp>
+        <p:nvSpPr>
+          <p:cNvPr id="107" name="Google Shape;107;p18"/>
+          <p:cNvSpPr/>
+          <p:nvPr/>
+        </p:nvSpPr>
+        <p:spPr>
+          <a:xfrm>
+            <a:off x="402961" y="1448759"/>
+            <a:ext cx="1498200" cy="711900"/>
+          </a:xfrm>
+          <a:prstGeom prst="roundRect">
+            <a:avLst>
+              <a:gd fmla="val 11687" name="adj"/>
+            </a:avLst>
+          </a:prstGeom>
+          <a:solidFill>
+            <a:srgbClr val="FFFFFF"/>
+          </a:solidFill>
+          <a:ln cap="flat" cmpd="sng" w="8125">
+            <a:solidFill>
+              <a:srgbClr val="FF7047"/>
+            </a:solidFill>
+            <a:prstDash val="solid"/>
+            <a:round/>
+            <a:headEnd len="sm" w="sm" type="none"/>
+            <a:tailEnd len="sm" w="sm" type="none"/>
+          </a:ln>
+        </p:spPr>
+        <p:txBody>
+          <a:bodyPr anchorCtr="0" anchor="ctr" bIns="78100" lIns="78100" spcFirstLastPara="1" rIns="78100" wrap="square" tIns="78100">
+            <a:noAutofit/>
+          </a:bodyPr>
+          <a:lstStyle/>
+          <a:p>
+            <a:pPr indent="0" lvl="0" marL="0" rtl="0" algn="ctr">
+              <a:lnSpc>
+                <a:spcPct val="157575"/>
+              </a:lnSpc>
+              <a:spcBef>
+                <a:spcPts val="0"/>
+              </a:spcBef>
+              <a:spcAft>
+                <a:spcPts val="0"/>
+              </a:spcAft>
+              <a:buNone/>
+            </a:pPr>
+            <a:r>
+              <a:rPr b="1" lang="fr" sz="1054">
+                <a:solidFill>
+                  <a:srgbClr val="55575A"/>
+                </a:solidFill>
+                <a:latin typeface="Manrope"/>
+                <a:ea typeface="Manrope"/>
+                <a:cs typeface="Manrope"/>
+                <a:sym typeface="Manrope"/>
+              </a:rPr>
+              <a:t xml:space="preserve"> 1. </a:t>
+            </a:r>
+            <a:r>
+              <a:rPr b="1" lang="fr" sz="1054">
+                <a:solidFill>
+                  <a:srgbClr val="55575A"/>
+                </a:solidFill>
+                <a:latin typeface="Manrope"/>
+                <a:ea typeface="Manrope"/>
+                <a:cs typeface="Manrope"/>
+                <a:sym typeface="Manrope"/>
+              </a:rPr>
+              <a:t>Zone brute immuable</a:t>
+            </a:r>
+            <a:endParaRPr b="1" sz="1054">
+              <a:solidFill>
+                <a:srgbClr val="55575A"/>
+              </a:solidFill>
+              <a:latin typeface="Manrope"/>
+              <a:ea typeface="Manrope"/>
+              <a:cs typeface="Manrope"/>
+              <a:sym typeface="Manrope"/>
+            </a:endParaRPr>
+          </a:p>
+        </p:txBody>
+      </p:sp>
+      <p:sp>
+        <p:nvSpPr>
+          <p:cNvPr id="108" name="Google Shape;108;p18"/>
+          <p:cNvSpPr/>
+          <p:nvPr/>
+        </p:nvSpPr>
+        <p:spPr>
+          <a:xfrm>
+            <a:off x="2194798" y="1438311"/>
+            <a:ext cx="1498200" cy="711900"/>
+          </a:xfrm>
+          <a:prstGeom prst="roundRect">
+            <a:avLst>
+              <a:gd fmla="val 11687" name="adj"/>
+            </a:avLst>
+          </a:prstGeom>
+          <a:solidFill>
+            <a:srgbClr val="FFFFFF"/>
+          </a:solidFill>
+          <a:ln cap="flat" cmpd="sng" w="8125">
+            <a:solidFill>
+              <a:srgbClr val="FF7047"/>
+            </a:solidFill>
+            <a:prstDash val="solid"/>
+            <a:round/>
+            <a:headEnd len="sm" w="sm" type="none"/>
+            <a:tailEnd len="sm" w="sm" type="none"/>
+          </a:ln>
+        </p:spPr>
+        <p:txBody>
+          <a:bodyPr anchorCtr="0" anchor="ctr" bIns="78100" lIns="78100" spcFirstLastPara="1" rIns="78100" wrap="square" tIns="78100">
+            <a:noAutofit/>
+          </a:bodyPr>
+          <a:lstStyle/>
+          <a:p>
+            <a:pPr indent="0" lvl="0" marL="0" rtl="0" algn="ctr">
+              <a:lnSpc>
+                <a:spcPct val="157575"/>
+              </a:lnSpc>
+              <a:spcBef>
+                <a:spcPts val="0"/>
+              </a:spcBef>
+              <a:spcAft>
+                <a:spcPts val="0"/>
+              </a:spcAft>
+              <a:buNone/>
+            </a:pPr>
+            <a:r>
+              <a:rPr b="1" lang="fr" sz="1000">
+                <a:solidFill>
+                  <a:srgbClr val="55575A"/>
+                </a:solidFill>
+                <a:latin typeface="Manrope"/>
+                <a:ea typeface="Manrope"/>
+                <a:cs typeface="Manrope"/>
+                <a:sym typeface="Manrope"/>
+              </a:rPr>
+              <a:t xml:space="preserve">2. Ingestion idempotente </a:t>
+            </a:r>
+            <a:br>
+              <a:rPr b="1" lang="fr" sz="1000">
+                <a:solidFill>
+                  <a:srgbClr val="55575A"/>
+                </a:solidFill>
+                <a:latin typeface="Manrope"/>
+                <a:ea typeface="Manrope"/>
+                <a:cs typeface="Manrope"/>
+                <a:sym typeface="Manrope"/>
+              </a:rPr>
+            </a:br>
+            <a:r>
+              <a:rPr b="1" lang="fr" sz="1000">
+                <a:solidFill>
+                  <a:srgbClr val="55575A"/>
+                </a:solidFill>
+                <a:latin typeface="Manrope"/>
+                <a:ea typeface="Manrope"/>
+                <a:cs typeface="Manrope"/>
+                <a:sym typeface="Manrope"/>
+              </a:rPr>
+              <a:t>par manifeste d'identifiants</a:t>
+            </a:r>
+            <a:endParaRPr b="1" sz="1000">
+              <a:solidFill>
+                <a:srgbClr val="55575A"/>
+              </a:solidFill>
+              <a:latin typeface="Manrope"/>
+              <a:ea typeface="Manrope"/>
+              <a:cs typeface="Manrope"/>
+              <a:sym typeface="Manrope"/>
+            </a:endParaRPr>
+          </a:p>
+        </p:txBody>
+      </p:sp>
+      <p:sp>
+        <p:nvSpPr>
+          <p:cNvPr id="109" name="Google Shape;109;p18"/>
+          <p:cNvSpPr/>
+          <p:nvPr/>
+        </p:nvSpPr>
+        <p:spPr>
+          <a:xfrm>
+            <a:off x="3764412" y="1449638"/>
+            <a:ext cx="1498200" cy="711900"/>
+          </a:xfrm>
+          <a:prstGeom prst="roundRect">
+            <a:avLst>
+              <a:gd fmla="val 11687" name="adj"/>
+            </a:avLst>
+          </a:prstGeom>
+          <a:solidFill>
+            <a:srgbClr val="FFFFFF"/>
+          </a:solidFill>
+          <a:ln cap="flat" cmpd="sng" w="8125">
+            <a:solidFill>
+              <a:srgbClr val="FF7047"/>
+            </a:solidFill>
+            <a:prstDash val="solid"/>
+            <a:round/>
+            <a:headEnd len="sm" w="sm" type="none"/>
+            <a:tailEnd len="sm" w="sm" type="none"/>
+          </a:ln>
+        </p:spPr>
+        <p:txBody>
+          <a:bodyPr anchorCtr="0" anchor="ctr" bIns="78100" lIns="78100" spcFirstLastPara="1" rIns="78100" wrap="square" tIns="78100">
+            <a:noAutofit/>
+          </a:bodyPr>
+          <a:lstStyle/>
+          <a:p>
+            <a:pPr indent="0" lvl="0" marL="0" rtl="0" algn="ctr">
+              <a:lnSpc>
+                <a:spcPct val="157575"/>
+              </a:lnSpc>
+              <a:spcBef>
+                <a:spcPts val="0"/>
+              </a:spcBef>
+              <a:spcAft>
+                <a:spcPts val="0"/>
+              </a:spcAft>
+              <a:buNone/>
+            </a:pPr>
+            <a:r>
+              <a:rPr b="1" lang="fr" sz="1200">
+                <a:solidFill>
+                  <a:srgbClr val="55575A"/>
+                </a:solidFill>
+                <a:latin typeface="Manrope"/>
+                <a:ea typeface="Manrope"/>
+                <a:cs typeface="Manrope"/>
+                <a:sym typeface="Manrope"/>
+              </a:rPr>
+              <a:t>3. Pseudonymisation HMAC salée</a:t>
+            </a:r>
+            <a:endParaRPr b="1" sz="1200">
+              <a:solidFill>
+                <a:srgbClr val="55575A"/>
+              </a:solidFill>
+              <a:latin typeface="Manrope"/>
+              <a:ea typeface="Manrope"/>
+              <a:cs typeface="Manrope"/>
+              <a:sym typeface="Manrope"/>
+            </a:endParaRPr>
+          </a:p>
+        </p:txBody>
+      </p:sp>
+      <p:sp>
+        <p:nvSpPr>
+          <p:cNvPr id="110" name="Google Shape;110;p18"/>
+          <p:cNvSpPr/>
+          <p:nvPr/>
+        </p:nvSpPr>
+        <p:spPr>
+          <a:xfrm>
+            <a:off x="5351099" y="1449650"/>
+            <a:ext cx="1498200" cy="711900"/>
+          </a:xfrm>
+          <a:prstGeom prst="roundRect">
+            <a:avLst>
+              <a:gd fmla="val 11687" name="adj"/>
+            </a:avLst>
+          </a:prstGeom>
+          <a:solidFill>
+            <a:srgbClr val="FFFFFF"/>
+          </a:solidFill>
+          <a:ln cap="flat" cmpd="sng" w="8125">
+            <a:solidFill>
+              <a:srgbClr val="FF7047"/>
+            </a:solidFill>
+            <a:prstDash val="solid"/>
+            <a:round/>
+            <a:headEnd len="sm" w="sm" type="none"/>
+            <a:tailEnd len="sm" w="sm" type="none"/>
+          </a:ln>
+        </p:spPr>
+        <p:txBody>
+          <a:bodyPr anchorCtr="0" anchor="ctr" bIns="78100" lIns="78100" spcFirstLastPara="1" rIns="78100" wrap="square" tIns="78100">
+            <a:noAutofit/>
+          </a:bodyPr>
+          <a:lstStyle/>
+          <a:p>
+            <a:pPr indent="0" lvl="0" marL="0" rtl="0" algn="l">
+              <a:lnSpc>
+                <a:spcPct val="157575"/>
+              </a:lnSpc>
+              <a:spcBef>
+                <a:spcPts val="0"/>
+              </a:spcBef>
+              <a:spcAft>
+                <a:spcPts val="0"/>
+              </a:spcAft>
+              <a:buNone/>
+            </a:pPr>
+            <a:r>
+              <a:rPr b="1" lang="fr" sz="1200">
+                <a:solidFill>
+                  <a:srgbClr val="55575A"/>
+                </a:solidFill>
+                <a:latin typeface="Manrope"/>
+                <a:ea typeface="Manrope"/>
+                <a:cs typeface="Manrope"/>
+                <a:sym typeface="Manrope"/>
+              </a:rPr>
+              <a:t>4. Contrôles bloquants</a:t>
+            </a:r>
+            <a:endParaRPr b="1" sz="1200">
+              <a:solidFill>
+                <a:srgbClr val="55575A"/>
+              </a:solidFill>
+              <a:latin typeface="Manrope"/>
+              <a:ea typeface="Manrope"/>
+              <a:cs typeface="Manrope"/>
+              <a:sym typeface="Manrope"/>
+            </a:endParaRPr>
+          </a:p>
+        </p:txBody>
+      </p:sp>
+      <p:sp>
+        <p:nvSpPr>
+          <p:cNvPr id="111" name="Google Shape;111;p18"/>
+          <p:cNvSpPr/>
+          <p:nvPr/>
+        </p:nvSpPr>
+        <p:spPr>
+          <a:xfrm>
+            <a:off x="6937799" y="1460100"/>
+            <a:ext cx="1498200" cy="711900"/>
+          </a:xfrm>
+          <a:prstGeom prst="roundRect">
+            <a:avLst>
+              <a:gd fmla="val 11687" name="adj"/>
+            </a:avLst>
+          </a:prstGeom>
+          <a:solidFill>
+            <a:srgbClr val="FFFFFF"/>
+          </a:solidFill>
+          <a:ln cap="flat" cmpd="sng" w="8125">
+            <a:solidFill>
+              <a:srgbClr val="FF7047"/>
+            </a:solidFill>
+            <a:prstDash val="solid"/>
+            <a:round/>
+            <a:headEnd len="sm" w="sm" type="none"/>
+            <a:tailEnd len="sm" w="sm" type="none"/>
+          </a:ln>
+        </p:spPr>
+        <p:txBody>
+          <a:bodyPr anchorCtr="0" anchor="ctr" bIns="78100" lIns="78100" spcFirstLastPara="1" rIns="78100" wrap="square" tIns="78100">
+            <a:noAutofit/>
+          </a:bodyPr>
+          <a:lstStyle/>
+          <a:p>
+            <a:pPr indent="0" lvl="0" marL="0" rtl="0" algn="ctr">
+              <a:lnSpc>
+                <a:spcPct val="157575"/>
+              </a:lnSpc>
+              <a:spcBef>
+                <a:spcPts val="0"/>
+              </a:spcBef>
+              <a:spcAft>
+                <a:spcPts val="0"/>
+              </a:spcAft>
+              <a:buNone/>
+            </a:pPr>
+            <a:r>
+              <a:rPr b="1" lang="fr" sz="1200">
+                <a:solidFill>
+                  <a:srgbClr val="55575A"/>
+                </a:solidFill>
+                <a:latin typeface="Manrope"/>
+                <a:ea typeface="Manrope"/>
+                <a:cs typeface="Manrope"/>
+                <a:sym typeface="Manrope"/>
+              </a:rPr>
+              <a:t>5. Traçabilité du commit au modèle</a:t>
+            </a:r>
+            <a:endParaRPr b="1" sz="1200">
+              <a:solidFill>
+                <a:srgbClr val="55575A"/>
+              </a:solidFill>
+              <a:latin typeface="Manrope"/>
+              <a:ea typeface="Manrope"/>
+              <a:cs typeface="Manrope"/>
+              <a:sym typeface="Manrope"/>
+            </a:endParaRPr>
+          </a:p>
+        </p:txBody>
+      </p:sp>
+      <p:sp>
+        <p:nvSpPr>
+          <p:cNvPr id="112" name="Google Shape;112;p18"/>
+          <p:cNvSpPr txBox="1"/>
+          <p:nvPr/>
+        </p:nvSpPr>
+        <p:spPr>
+          <a:xfrm>
+            <a:off x="402950" y="2701550"/>
+            <a:ext cx="8033100" cy="1639200"/>
+          </a:xfrm>
+          <a:prstGeom prst="rect">
+            <a:avLst/>
+          </a:prstGeom>
+          <a:noFill/>
+          <a:ln>
+            <a:noFill/>
+          </a:ln>
+        </p:spPr>
+        <p:txBody>
+          <a:bodyPr anchorCtr="0" anchor="t" bIns="91425" lIns="91425" spcFirstLastPara="1" rIns="91425" wrap="square" tIns="91425">
+            <a:spAutoFit/>
+          </a:bodyPr>
+          <a:lstStyle/>
+          <a:p>
+            <a:pPr indent="0" lvl="0" marL="0" rtl="0" algn="l">
+              <a:lnSpc>
+                <a:spcPct val="115000"/>
+              </a:lnSpc>
+              <a:spcBef>
+                <a:spcPts val="0"/>
+              </a:spcBef>
+              <a:spcAft>
+                <a:spcPts val="0"/>
+              </a:spcAft>
+              <a:buNone/>
+            </a:pPr>
+            <a:r>
+              <a:rPr b="1" lang="fr">
+                <a:solidFill>
+                  <a:srgbClr val="015955"/>
+                </a:solidFill>
+                <a:highlight>
+                  <a:schemeClr val="lt1"/>
+                </a:highlight>
+              </a:rPr>
+              <a:t>Pourquoi un pilote :</a:t>
+            </a:r>
+            <a:r>
+              <a:rPr lang="fr">
+                <a:solidFill>
+                  <a:srgbClr val="27251E"/>
+                </a:solidFill>
+                <a:highlight>
+                  <a:schemeClr val="lt1"/>
+                </a:highlight>
+              </a:rPr>
+              <a:t> </a:t>
+            </a:r>
+            <a:endParaRPr>
+              <a:solidFill>
+                <a:srgbClr val="27251E"/>
+              </a:solidFill>
+              <a:highlight>
+                <a:schemeClr val="lt1"/>
+              </a:highlight>
+            </a:endParaRPr>
+          </a:p>
+          <a:p>
+            <a:pPr indent="-317500" lvl="0" marL="457200" rtl="0" algn="l">
+              <a:lnSpc>
+                <a:spcPct val="115000"/>
+              </a:lnSpc>
+              <a:spcBef>
+                <a:spcPts val="0"/>
+              </a:spcBef>
+              <a:spcAft>
+                <a:spcPts val="0"/>
+              </a:spcAft>
+              <a:buClr>
+                <a:schemeClr val="dk2"/>
+              </a:buClr>
+              <a:buSzPts val="1400"/>
+              <a:buChar char="●"/>
+            </a:pPr>
+            <a:r>
+              <a:rPr lang="fr">
+                <a:solidFill>
+                  <a:schemeClr val="dk2"/>
+                </a:solidFill>
+                <a:highlight>
+                  <a:schemeClr val="lt1"/>
+                </a:highlight>
+              </a:rPr>
+              <a:t>le cas</a:t>
+            </a:r>
+            <a:r>
+              <a:rPr lang="fr">
+                <a:solidFill>
+                  <a:schemeClr val="dk2"/>
+                </a:solidFill>
+              </a:rPr>
+              <a:t xml:space="preserve"> </a:t>
+            </a:r>
+            <a:r>
+              <a:rPr b="1" lang="fr">
+                <a:solidFill>
+                  <a:schemeClr val="dk2"/>
+                </a:solidFill>
+              </a:rPr>
+              <a:t>l'exige avant la généralisation</a:t>
+            </a:r>
+            <a:endParaRPr b="1">
+              <a:solidFill>
+                <a:schemeClr val="dk2"/>
+              </a:solidFill>
+            </a:endParaRPr>
+          </a:p>
+          <a:p>
+            <a:pPr indent="-317500" lvl="0" marL="457200" rtl="0" algn="l">
+              <a:lnSpc>
+                <a:spcPct val="115000"/>
+              </a:lnSpc>
+              <a:spcBef>
+                <a:spcPts val="0"/>
+              </a:spcBef>
+              <a:spcAft>
+                <a:spcPts val="0"/>
+              </a:spcAft>
+              <a:buClr>
+                <a:schemeClr val="dk2"/>
+              </a:buClr>
+              <a:buSzPts val="1400"/>
+              <a:buChar char="●"/>
+            </a:pPr>
+            <a:r>
+              <a:rPr lang="fr">
+                <a:solidFill>
+                  <a:schemeClr val="dk2"/>
+                </a:solidFill>
+                <a:highlight>
+                  <a:schemeClr val="lt1"/>
+                </a:highlight>
+              </a:rPr>
+              <a:t>Un cadre qui n'a jamais tourné n'est pas un cadre</a:t>
+            </a:r>
+            <a:r>
+              <a:rPr lang="fr">
+                <a:solidFill>
+                  <a:schemeClr val="dk2"/>
+                </a:solidFill>
+              </a:rPr>
+              <a:t xml:space="preserve"> — </a:t>
+            </a:r>
+            <a:r>
+              <a:rPr b="1" lang="fr">
+                <a:solidFill>
+                  <a:schemeClr val="dk2"/>
+                </a:solidFill>
+              </a:rPr>
+              <a:t xml:space="preserve">il se démontre au lieu de se décrire </a:t>
+            </a:r>
+            <a:endParaRPr b="1">
+              <a:solidFill>
+                <a:schemeClr val="dk2"/>
+              </a:solidFill>
+            </a:endParaRPr>
+          </a:p>
+          <a:p>
+            <a:pPr indent="-317500" lvl="0" marL="457200" rtl="0" algn="l">
+              <a:lnSpc>
+                <a:spcPct val="115000"/>
+              </a:lnSpc>
+              <a:spcBef>
+                <a:spcPts val="0"/>
+              </a:spcBef>
+              <a:spcAft>
+                <a:spcPts val="0"/>
+              </a:spcAft>
+              <a:buClr>
+                <a:schemeClr val="dk2"/>
+              </a:buClr>
+              <a:buSzPts val="1400"/>
+              <a:buChar char="●"/>
+            </a:pPr>
+            <a:r>
+              <a:rPr lang="fr">
+                <a:solidFill>
+                  <a:schemeClr val="dk2"/>
+                </a:solidFill>
+                <a:highlight>
+                  <a:schemeClr val="lt1"/>
+                </a:highlight>
+              </a:rPr>
+              <a:t>Ce qui manque</a:t>
+            </a:r>
+            <a:r>
+              <a:rPr lang="fr">
+                <a:solidFill>
+                  <a:schemeClr val="dk2"/>
+                </a:solidFill>
+              </a:rPr>
+              <a:t xml:space="preserve"> y est nommé </a:t>
+            </a:r>
+            <a:r>
+              <a:rPr b="1" lang="fr">
+                <a:solidFill>
+                  <a:schemeClr val="dk2"/>
+                </a:solidFill>
+              </a:rPr>
+              <a:t>comme manquant</a:t>
+            </a:r>
+            <a:endParaRPr b="1">
+              <a:solidFill>
+                <a:schemeClr val="dk2"/>
+              </a:solidFill>
+            </a:endParaRPr>
+          </a:p>
+          <a:p>
+            <a:pPr indent="-317500" lvl="0" marL="457200" rtl="0" algn="l">
+              <a:lnSpc>
+                <a:spcPct val="115000"/>
+              </a:lnSpc>
+              <a:spcBef>
+                <a:spcPts val="0"/>
+              </a:spcBef>
+              <a:spcAft>
+                <a:spcPts val="0"/>
+              </a:spcAft>
+              <a:buClr>
+                <a:schemeClr val="dk2"/>
+              </a:buClr>
+              <a:buSzPts val="1400"/>
+              <a:buChar char="●"/>
+            </a:pPr>
+            <a:r>
+              <a:rPr lang="fr">
+                <a:solidFill>
+                  <a:schemeClr val="dk2"/>
+                </a:solidFill>
+              </a:rPr>
+              <a:t xml:space="preserve">Dossier complet : docs/17_gouvernance.md </a:t>
+            </a:r>
+            <a:r>
+              <a:rPr b="1" lang="fr">
+                <a:solidFill>
+                  <a:schemeClr val="dk2"/>
+                </a:solidFill>
+              </a:rPr>
+              <a:t/>
+            </a:r>
+            <a:endParaRPr>
+              <a:solidFill>
+                <a:schemeClr val="dk2"/>
+              </a:solidFill>
+            </a:endParaRPr>
+          </a:p>
+          <a:p>
+            <a:pPr indent="-317500" lvl="0" marL="457200" rtl="0" algn="l">
+              <a:lnSpc>
+                <a:spcPct val="115000"/>
+              </a:lnSpc>
+              <a:spcBef>
+                <a:spcPts val="0"/>
+              </a:spcBef>
+              <a:spcAft>
+                <a:spcPts val="0"/>
+              </a:spcAft>
+              <a:buClr>
+                <a:schemeClr val="dk2"/>
+              </a:buClr>
+              <a:buSzPts val="1400"/>
+              <a:buChar char="●"/>
+            </a:pPr>
+            <a:r>
+              <a:rPr lang="fr">
+                <a:solidFill>
+                  <a:schemeClr val="dk2"/>
+                </a:solidFill>
+              </a:rPr>
+              <a:t xml:space="preserve">Exigences relevées : docs/00_sources/ </a:t>
+            </a:r>
+            <a:r>
+              <a:rPr b="1" lang="fr">
+                <a:solidFill>
+                  <a:schemeClr val="dk2"/>
+                </a:solidFill>
+              </a:rPr>
+              <a:t/>
+            </a:r>
+            <a:r>
+              <a:rPr lang="fr">
+                <a:solidFill>
+                  <a:schemeClr val="dk2"/>
+                </a:solidFill>
+              </a:rPr>
+              <a:t/>
+            </a:r>
+            <a:endParaRPr sz="1800">
+              <a:solidFill>
+                <a:schemeClr val="dk2"/>
+              </a:solidFill>
+            </a:endParaRPr>
+          </a:p>
+        </p:txBody>
+      </p:sp>
+    </p:spTree>
+  </p:cSld>
+  <p:clrMapOvr>
+    <a:masterClrMapping/>
+  </p:clrMapOvr>
+</p:sld>
 </file>
 
 <file path=ppt/theme/theme1.xml><?xml version="1.0" encoding="utf-8"?>
